--- a/public/fun/pack/pptx/birthday/돌잔치_33_사진중심_완행열차.pptx
+++ b/public/fun/pack/pptx/birthday/돌잔치_33_사진중심_완행열차.pptx
@@ -3286,6 +3286,14 @@
 <file path=ppt/slides/slide1.xml><?xml version="1.0" encoding="utf-8"?>
 <p:sld xmlns:a="http://schemas.openxmlformats.org/drawingml/2006/main" xmlns:p="http://schemas.openxmlformats.org/presentationml/2006/main" xmlns:r="http://schemas.openxmlformats.org/officeDocument/2006/relationships">
   <p:cSld>
+    <p:bg>
+      <p:bgPr>
+        <a:solidFill>
+          <a:srgbClr val="FBF1EC"/>
+        </a:solidFill>
+        <a:effectLst/>
+      </p:bgPr>
+    </p:bg>
     <p:spTree>
       <p:nvGrpSpPr>
         <p:cNvPr id="1" name=""/>
@@ -3293,30 +3301,116 @@
         <p:nvPr/>
       </p:nvGrpSpPr>
       <p:grpSpPr/>
-      <p:pic>
-        <p:nvPicPr>
-          <p:cNvPr id="3" name="표지 그림" descr="birthday-33.jpg"/>
-          <p:cNvPicPr>
-            <a:picLocks noChangeAspect="1"/>
-          </p:cNvPicPr>
+      <p:sp>
+        <p:nvSpPr>
+          <p:cNvPr id="3" name="사진 자리"/>
+          <p:cNvSpPr/>
           <p:nvPr/>
-        </p:nvPicPr>
-        <p:blipFill>
-          <a:blip r:embed="rId2"/>
-          <a:stretch>
-            <a:fillRect/>
-          </a:stretch>
-        </p:blipFill>
+        </p:nvSpPr>
         <p:spPr>
           <a:xfrm>
             <a:off x="0" y="0"/>
-            <a:ext cx="12191695" cy="6858000"/>
+            <a:ext cx="4389010" cy="6858000"/>
           </a:xfrm>
           <a:prstGeom prst="rect">
             <a:avLst/>
           </a:prstGeom>
-        </p:spPr>
-      </p:pic>
+          <a:solidFill>
+            <a:srgbClr val="EBC0AD"/>
+          </a:solidFill>
+          <a:ln>
+            <a:noFill/>
+          </a:ln>
+        </p:spPr>
+        <p:txBody>
+          <a:bodyPr rtlCol="0" anchor="ctr" wrap="square" lIns="54864" rIns="54864" tIns="27432" bIns="27432">
+            <a:noAutofit/>
+          </a:bodyPr>
+          <a:lstStyle/>
+          <a:p>
+            <a:pPr algn="ctr">
+              <a:lnSpc>
+                <a:spcPct val="100000"/>
+              </a:lnSpc>
+            </a:pPr>
+            <a:r>
+              <a:rPr sz="1400" b="0" i="0">
+                <a:solidFill>
+                  <a:srgbClr val="493127"/>
+                </a:solidFill>
+              </a:rPr>
+              <a:t>사진을 넣어 주세요</a:t>
+            </a:r>
+          </a:p>
+        </p:txBody>
+      </p:sp>
+      <p:sp>
+        <p:nvSpPr>
+          <p:cNvPr id="4" name="장식"/>
+          <p:cNvSpPr/>
+          <p:nvPr/>
+        </p:nvSpPr>
+        <p:spPr>
+          <a:xfrm>
+            <a:off x="365750" y="365760"/>
+            <a:ext cx="3657508" cy="6126480"/>
+          </a:xfrm>
+          <a:prstGeom prst="rect">
+            <a:avLst/>
+          </a:prstGeom>
+          <a:noFill/>
+          <a:ln w="9525">
+            <a:solidFill>
+              <a:srgbClr val="26231F"/>
+            </a:solidFill>
+          </a:ln>
+        </p:spPr>
+        <p:txBody>
+          <a:bodyPr rtlCol="0" anchor="ctr"/>
+          <a:lstStyle/>
+          <a:p>
+            <a:pPr algn="ctr"/>
+          </a:p>
+        </p:txBody>
+      </p:sp>
+      <p:sp>
+        <p:nvSpPr>
+          <p:cNvPr id="5" name="라벨"/>
+          <p:cNvSpPr txBox="1"/>
+          <p:nvPr/>
+        </p:nvSpPr>
+        <p:spPr>
+          <a:xfrm>
+            <a:off x="6827349" y="2148840"/>
+            <a:ext cx="4632844" cy="274320"/>
+          </a:xfrm>
+          <a:prstGeom prst="rect">
+            <a:avLst/>
+          </a:prstGeom>
+          <a:noFill/>
+        </p:spPr>
+        <p:txBody>
+          <a:bodyPr wrap="square" lIns="54864" rIns="54864" tIns="27432" bIns="27432" anchor="t">
+            <a:noAutofit/>
+          </a:bodyPr>
+          <a:lstStyle/>
+          <a:p>
+            <a:pPr algn="l">
+              <a:lnSpc>
+                <a:spcPct val="115000"/>
+              </a:lnSpc>
+            </a:pPr>
+            <a:r>
+              <a:rPr sz="1000" b="1" i="0" spc="250">
+                <a:solidFill>
+                  <a:srgbClr val="26231F"/>
+                </a:solidFill>
+              </a:rPr>
+              <a:t>FIRST BIRTHDAY</a:t>
+            </a:r>
+          </a:p>
+        </p:txBody>
+      </p:sp>
       <p:sp>
         <p:nvSpPr>
           <p:cNvPr id="2" name="Title 1"/>
@@ -3329,8 +3423,8 @@
         </p:nvSpPr>
         <p:spPr>
           <a:xfrm>
-            <a:off x="853418" y="2057400"/>
-            <a:ext cx="6095847" cy="1554480"/>
+            <a:off x="6827349" y="2606040"/>
+            <a:ext cx="4632844" cy="1188720"/>
           </a:xfrm>
         </p:spPr>
         <p:txBody>
@@ -3347,7 +3441,7 @@
             <a:r>
               <a:rPr sz="4000" b="1" i="0">
                 <a:solidFill>
-                  <a:srgbClr val="422D24"/>
+                  <a:srgbClr val="26231F"/>
                 </a:solidFill>
               </a:rPr>
               <a:t>첫 번째 생일</a:t>
@@ -3357,14 +3451,14 @@
       </p:sp>
       <p:sp>
         <p:nvSpPr>
-          <p:cNvPr id="4" name="한 줄 문구"/>
+          <p:cNvPr id="6" name="한 줄 문구"/>
           <p:cNvSpPr txBox="1"/>
           <p:nvPr/>
         </p:nvSpPr>
         <p:spPr>
           <a:xfrm>
-            <a:off x="853418" y="3749039"/>
-            <a:ext cx="6095847" cy="822960"/>
+            <a:off x="6827349" y="3886200"/>
+            <a:ext cx="4632844" cy="822960"/>
           </a:xfrm>
           <a:prstGeom prst="rect">
             <a:avLst/>
@@ -3383,9 +3477,9 @@
               </a:lnSpc>
             </a:pPr>
             <a:r>
-              <a:rPr sz="1700" b="0" i="1">
+              <a:rPr sz="1700" b="0" i="0">
                 <a:solidFill>
-                  <a:srgbClr val="422D24"/>
+                  <a:srgbClr val="26231F"/>
                 </a:solidFill>
               </a:rPr>
               <a:t>가장 많이 찍은 얼굴만 모았습니다</a:t>
@@ -3395,14 +3489,14 @@
       </p:sp>
       <p:sp>
         <p:nvSpPr>
-          <p:cNvPr id="5" name="안내 문구"/>
+          <p:cNvPr id="7" name="안내 문구"/>
           <p:cNvSpPr txBox="1"/>
           <p:nvPr/>
         </p:nvSpPr>
         <p:spPr>
           <a:xfrm>
-            <a:off x="853418" y="4617720"/>
-            <a:ext cx="6095847" cy="914400"/>
+            <a:off x="6827349" y="4754880"/>
+            <a:ext cx="4632844" cy="914400"/>
           </a:xfrm>
           <a:prstGeom prst="rect">
             <a:avLst/>
@@ -3423,10 +3517,10 @@
             <a:r>
               <a:rPr sz="1400" b="0" i="0">
                 <a:solidFill>
-                  <a:srgbClr val="666666"/>
+                  <a:srgbClr val="26231F"/>
                 </a:solidFill>
               </a:rPr>
-              <a:t>아기 이름 · 2027. 00. 00</a:t>
+              <a:t>아기 이름 · 날짜 입력</a:t>
             </a:r>
           </a:p>
           <a:p>
@@ -3438,7 +3532,7 @@
             <a:r>
               <a:rPr sz="1400" b="0" i="0">
                 <a:solidFill>
-                  <a:srgbClr val="666666"/>
+                  <a:srgbClr val="26231F"/>
                 </a:solidFill>
               </a:rPr>
               <a:t>장소를 입력하세요</a:t>
@@ -3460,7 +3554,7 @@
     <p:bg>
       <p:bgPr>
         <a:solidFill>
-          <a:srgbClr val="FFFFFF"/>
+          <a:srgbClr val="F6DFD5"/>
         </a:solidFill>
         <a:effectLst/>
       </p:bgPr>
@@ -3480,14 +3574,14 @@
         </p:nvSpPr>
         <p:spPr>
           <a:xfrm>
-            <a:off x="9905695" y="-1463040"/>
-            <a:ext cx="3840480" cy="3840480"/>
-          </a:xfrm>
-          <a:prstGeom prst="ellipse">
+            <a:off x="640080" y="6400800"/>
+            <a:ext cx="10911535" cy="10972"/>
+          </a:xfrm>
+          <a:prstGeom prst="rect">
             <a:avLst/>
           </a:prstGeom>
           <a:solidFill>
-            <a:srgbClr val="EBDCD6"/>
+            <a:srgbClr val="26231F"/>
           </a:solidFill>
           <a:ln>
             <a:noFill/>
@@ -3503,20 +3597,58 @@
       </p:sp>
       <p:sp>
         <p:nvSpPr>
-          <p:cNvPr id="4" name="장식"/>
+          <p:cNvPr id="4" name="하단 라벨"/>
+          <p:cNvSpPr txBox="1"/>
+          <p:nvPr/>
+        </p:nvSpPr>
+        <p:spPr>
+          <a:xfrm>
+            <a:off x="640080" y="6437376"/>
+            <a:ext cx="5486400" cy="274320"/>
+          </a:xfrm>
+          <a:prstGeom prst="rect">
+            <a:avLst/>
+          </a:prstGeom>
+          <a:noFill/>
+        </p:spPr>
+        <p:txBody>
+          <a:bodyPr wrap="square" lIns="54864" rIns="54864" tIns="27432" bIns="27432" anchor="ctr">
+            <a:noAutofit/>
+          </a:bodyPr>
+          <a:lstStyle/>
+          <a:p>
+            <a:pPr algn="l">
+              <a:lnSpc>
+                <a:spcPct val="115000"/>
+              </a:lnSpc>
+            </a:pPr>
+            <a:r>
+              <a:rPr sz="900" b="1" i="0" spc="250">
+                <a:solidFill>
+                  <a:srgbClr val="26231F"/>
+                </a:solidFill>
+              </a:rPr>
+              <a:t>FIRST BIRTHDAY</a:t>
+            </a:r>
+          </a:p>
+        </p:txBody>
+      </p:sp>
+      <p:sp>
+        <p:nvSpPr>
+          <p:cNvPr id="5" name="포인트"/>
           <p:cNvSpPr/>
           <p:nvPr/>
         </p:nvSpPr>
         <p:spPr>
-          <a:xfrm>
-            <a:off x="11094415" y="274320"/>
-            <a:ext cx="411480" cy="411480"/>
-          </a:xfrm>
-          <a:prstGeom prst="ellipse">
+          <a:xfrm rot="18900000">
+            <a:off x="11213287" y="6473952"/>
+            <a:ext cx="219456" cy="219456"/>
+          </a:xfrm>
+          <a:prstGeom prst="teardrop">
             <a:avLst/>
           </a:prstGeom>
           <a:solidFill>
-            <a:srgbClr val="855A47"/>
+            <a:srgbClr val="D89579"/>
           </a:solidFill>
           <a:ln>
             <a:noFill/>
@@ -3542,8 +3674,8 @@
         </p:nvSpPr>
         <p:spPr>
           <a:xfrm>
-            <a:off x="640080" y="457200"/>
-            <a:ext cx="9722815" cy="868680"/>
+            <a:off x="640080" y="502920"/>
+            <a:ext cx="10911535" cy="914400"/>
           </a:xfrm>
         </p:spPr>
         <p:txBody>
@@ -3560,7 +3692,7 @@
             <a:r>
               <a:rPr sz="3000" b="1" i="0">
                 <a:solidFill>
-                  <a:srgbClr val="422D24"/>
+                  <a:srgbClr val="26231F"/>
                 </a:solidFill>
               </a:rPr>
               <a:t>우리 아기를 소개합니다</a:t>
@@ -3570,14 +3702,14 @@
       </p:sp>
       <p:sp>
         <p:nvSpPr>
-          <p:cNvPr id="5" name="사진 자리"/>
+          <p:cNvPr id="6" name="사진 자리"/>
           <p:cNvSpPr/>
           <p:nvPr/>
         </p:nvSpPr>
         <p:spPr>
           <a:xfrm>
             <a:off x="640080" y="1600200"/>
-            <a:ext cx="3840480" cy="4617720"/>
+            <a:ext cx="3840480" cy="4389120"/>
           </a:xfrm>
           <a:prstGeom prst="roundRect">
             <a:avLst>
@@ -3585,12 +3717,10 @@
             </a:avLst>
           </a:prstGeom>
           <a:solidFill>
-            <a:srgbClr val="EBDCD6"/>
+            <a:srgbClr val="F6DFD5"/>
           </a:solidFill>
           <a:ln w="19050">
-            <a:solidFill>
-              <a:srgbClr val="855A47"/>
-            </a:solidFill>
+            <a:noFill/>
             <a:prstDash val="dash"/>
           </a:ln>
         </p:spPr>
@@ -3608,7 +3738,7 @@
             <a:r>
               <a:rPr sz="1400" b="0" i="0">
                 <a:solidFill>
-                  <a:srgbClr val="422D24"/>
+                  <a:srgbClr val="8E8780"/>
                 </a:solidFill>
               </a:rPr>
               <a:t>아기 사진을 넣어 주세요</a:t>
@@ -3618,7 +3748,7 @@
       </p:sp>
       <p:graphicFrame>
         <p:nvGraphicFramePr>
-          <p:cNvPr id="6" name="표"/>
+          <p:cNvPr id="7" name="표"/>
           <p:cNvGraphicFramePr>
             <a:graphicFrameLocks noGrp="1"/>
           </p:cNvGraphicFramePr>
@@ -3648,7 +3778,7 @@
                       <a:r>
                         <a:rPr sz="1500" b="1">
                           <a:solidFill>
-                            <a:srgbClr val="422D24"/>
+                            <a:srgbClr val="493127"/>
                           </a:solidFill>
                         </a:rPr>
                         <a:t>이름</a:t>
@@ -3658,30 +3788,30 @@
                   <a:tcPr anchor="ctr" marL="73152" marR="73152">
                     <a:lnL w="9525" cap="flat" cmpd="sng" algn="ctr">
                       <a:solidFill>
-                        <a:srgbClr val="EBDCD6"/>
+                        <a:srgbClr val="F6DFD5"/>
                       </a:solidFill>
                       <a:prstDash val="solid"/>
                     </a:lnL>
                     <a:lnR w="9525" cap="flat" cmpd="sng" algn="ctr">
                       <a:solidFill>
-                        <a:srgbClr val="EBDCD6"/>
+                        <a:srgbClr val="F6DFD5"/>
                       </a:solidFill>
                       <a:prstDash val="solid"/>
                     </a:lnR>
                     <a:lnT w="9525" cap="flat" cmpd="sng" algn="ctr">
                       <a:solidFill>
-                        <a:srgbClr val="EBDCD6"/>
+                        <a:srgbClr val="F6DFD5"/>
                       </a:solidFill>
                       <a:prstDash val="solid"/>
                     </a:lnT>
                     <a:lnB w="9525" cap="flat" cmpd="sng" algn="ctr">
                       <a:solidFill>
-                        <a:srgbClr val="EBDCD6"/>
+                        <a:srgbClr val="F6DFD5"/>
                       </a:solidFill>
                       <a:prstDash val="solid"/>
                     </a:lnB>
                     <a:solidFill>
-                      <a:srgbClr val="EBDCD6"/>
+                      <a:srgbClr val="F6DFD5"/>
                     </a:solidFill>
                   </a:tcPr>
                 </a:tc>
@@ -3694,7 +3824,7 @@
                       <a:r>
                         <a:rPr sz="1500" b="0">
                           <a:solidFill>
-                            <a:srgbClr val="2B2B2B"/>
+                            <a:srgbClr val="26231F"/>
                           </a:solidFill>
                         </a:rPr>
                         <a:t>입력하세요</a:t>
@@ -3704,30 +3834,30 @@
                   <a:tcPr anchor="ctr" marL="73152" marR="73152">
                     <a:lnL w="9525" cap="flat" cmpd="sng" algn="ctr">
                       <a:solidFill>
-                        <a:srgbClr val="EBDCD6"/>
+                        <a:srgbClr val="F6DFD5"/>
                       </a:solidFill>
                       <a:prstDash val="solid"/>
                     </a:lnL>
                     <a:lnR w="9525" cap="flat" cmpd="sng" algn="ctr">
                       <a:solidFill>
-                        <a:srgbClr val="EBDCD6"/>
+                        <a:srgbClr val="F6DFD5"/>
                       </a:solidFill>
                       <a:prstDash val="solid"/>
                     </a:lnR>
                     <a:lnT w="9525" cap="flat" cmpd="sng" algn="ctr">
                       <a:solidFill>
-                        <a:srgbClr val="EBDCD6"/>
+                        <a:srgbClr val="F6DFD5"/>
                       </a:solidFill>
                       <a:prstDash val="solid"/>
                     </a:lnT>
                     <a:lnB w="9525" cap="flat" cmpd="sng" algn="ctr">
                       <a:solidFill>
-                        <a:srgbClr val="EBDCD6"/>
+                        <a:srgbClr val="F6DFD5"/>
                       </a:solidFill>
                       <a:prstDash val="solid"/>
                     </a:lnB>
                     <a:solidFill>
-                      <a:srgbClr val="F8F4F2"/>
+                      <a:srgbClr val="FBF1EC"/>
                     </a:solidFill>
                   </a:tcPr>
                 </a:tc>
@@ -3742,7 +3872,7 @@
                       <a:r>
                         <a:rPr sz="1500" b="1">
                           <a:solidFill>
-                            <a:srgbClr val="422D24"/>
+                            <a:srgbClr val="493127"/>
                           </a:solidFill>
                         </a:rPr>
                         <a:t>생일</a:t>
@@ -3752,30 +3882,30 @@
                   <a:tcPr anchor="ctr" marL="73152" marR="73152">
                     <a:lnL w="9525" cap="flat" cmpd="sng" algn="ctr">
                       <a:solidFill>
-                        <a:srgbClr val="EBDCD6"/>
+                        <a:srgbClr val="F6DFD5"/>
                       </a:solidFill>
                       <a:prstDash val="solid"/>
                     </a:lnL>
                     <a:lnR w="9525" cap="flat" cmpd="sng" algn="ctr">
                       <a:solidFill>
-                        <a:srgbClr val="EBDCD6"/>
+                        <a:srgbClr val="F6DFD5"/>
                       </a:solidFill>
                       <a:prstDash val="solid"/>
                     </a:lnR>
                     <a:lnT w="9525" cap="flat" cmpd="sng" algn="ctr">
                       <a:solidFill>
-                        <a:srgbClr val="EBDCD6"/>
+                        <a:srgbClr val="F6DFD5"/>
                       </a:solidFill>
                       <a:prstDash val="solid"/>
                     </a:lnT>
                     <a:lnB w="9525" cap="flat" cmpd="sng" algn="ctr">
                       <a:solidFill>
-                        <a:srgbClr val="EBDCD6"/>
+                        <a:srgbClr val="F6DFD5"/>
                       </a:solidFill>
                       <a:prstDash val="solid"/>
                     </a:lnB>
                     <a:solidFill>
-                      <a:srgbClr val="EBDCD6"/>
+                      <a:srgbClr val="F6DFD5"/>
                     </a:solidFill>
                   </a:tcPr>
                 </a:tc>
@@ -3788,7 +3918,7 @@
                       <a:r>
                         <a:rPr sz="1500" b="0">
                           <a:solidFill>
-                            <a:srgbClr val="2B2B2B"/>
+                            <a:srgbClr val="26231F"/>
                           </a:solidFill>
                         </a:rPr>
                         <a:t>입력하세요</a:t>
@@ -3798,25 +3928,25 @@
                   <a:tcPr anchor="ctr" marL="73152" marR="73152">
                     <a:lnL w="9525" cap="flat" cmpd="sng" algn="ctr">
                       <a:solidFill>
-                        <a:srgbClr val="EBDCD6"/>
+                        <a:srgbClr val="F6DFD5"/>
                       </a:solidFill>
                       <a:prstDash val="solid"/>
                     </a:lnL>
                     <a:lnR w="9525" cap="flat" cmpd="sng" algn="ctr">
                       <a:solidFill>
-                        <a:srgbClr val="EBDCD6"/>
+                        <a:srgbClr val="F6DFD5"/>
                       </a:solidFill>
                       <a:prstDash val="solid"/>
                     </a:lnR>
                     <a:lnT w="9525" cap="flat" cmpd="sng" algn="ctr">
                       <a:solidFill>
-                        <a:srgbClr val="EBDCD6"/>
+                        <a:srgbClr val="F6DFD5"/>
                       </a:solidFill>
                       <a:prstDash val="solid"/>
                     </a:lnT>
                     <a:lnB w="9525" cap="flat" cmpd="sng" algn="ctr">
                       <a:solidFill>
-                        <a:srgbClr val="EBDCD6"/>
+                        <a:srgbClr val="F6DFD5"/>
                       </a:solidFill>
                       <a:prstDash val="solid"/>
                     </a:lnB>
@@ -3836,7 +3966,7 @@
                       <a:r>
                         <a:rPr sz="1500" b="1">
                           <a:solidFill>
-                            <a:srgbClr val="422D24"/>
+                            <a:srgbClr val="493127"/>
                           </a:solidFill>
                         </a:rPr>
                         <a:t>키 · 몸무게</a:t>
@@ -3846,30 +3976,30 @@
                   <a:tcPr anchor="ctr" marL="73152" marR="73152">
                     <a:lnL w="9525" cap="flat" cmpd="sng" algn="ctr">
                       <a:solidFill>
-                        <a:srgbClr val="EBDCD6"/>
+                        <a:srgbClr val="F6DFD5"/>
                       </a:solidFill>
                       <a:prstDash val="solid"/>
                     </a:lnL>
                     <a:lnR w="9525" cap="flat" cmpd="sng" algn="ctr">
                       <a:solidFill>
-                        <a:srgbClr val="EBDCD6"/>
+                        <a:srgbClr val="F6DFD5"/>
                       </a:solidFill>
                       <a:prstDash val="solid"/>
                     </a:lnR>
                     <a:lnT w="9525" cap="flat" cmpd="sng" algn="ctr">
                       <a:solidFill>
-                        <a:srgbClr val="EBDCD6"/>
+                        <a:srgbClr val="F6DFD5"/>
                       </a:solidFill>
                       <a:prstDash val="solid"/>
                     </a:lnT>
                     <a:lnB w="9525" cap="flat" cmpd="sng" algn="ctr">
                       <a:solidFill>
-                        <a:srgbClr val="EBDCD6"/>
+                        <a:srgbClr val="F6DFD5"/>
                       </a:solidFill>
                       <a:prstDash val="solid"/>
                     </a:lnB>
                     <a:solidFill>
-                      <a:srgbClr val="EBDCD6"/>
+                      <a:srgbClr val="F6DFD5"/>
                     </a:solidFill>
                   </a:tcPr>
                 </a:tc>
@@ -3882,7 +4012,7 @@
                       <a:r>
                         <a:rPr sz="1500" b="0">
                           <a:solidFill>
-                            <a:srgbClr val="2B2B2B"/>
+                            <a:srgbClr val="26231F"/>
                           </a:solidFill>
                         </a:rPr>
                         <a:t>입력하세요</a:t>
@@ -3892,30 +4022,30 @@
                   <a:tcPr anchor="ctr" marL="73152" marR="73152">
                     <a:lnL w="9525" cap="flat" cmpd="sng" algn="ctr">
                       <a:solidFill>
-                        <a:srgbClr val="EBDCD6"/>
+                        <a:srgbClr val="F6DFD5"/>
                       </a:solidFill>
                       <a:prstDash val="solid"/>
                     </a:lnL>
                     <a:lnR w="9525" cap="flat" cmpd="sng" algn="ctr">
                       <a:solidFill>
-                        <a:srgbClr val="EBDCD6"/>
+                        <a:srgbClr val="F6DFD5"/>
                       </a:solidFill>
                       <a:prstDash val="solid"/>
                     </a:lnR>
                     <a:lnT w="9525" cap="flat" cmpd="sng" algn="ctr">
                       <a:solidFill>
-                        <a:srgbClr val="EBDCD6"/>
+                        <a:srgbClr val="F6DFD5"/>
                       </a:solidFill>
                       <a:prstDash val="solid"/>
                     </a:lnT>
                     <a:lnB w="9525" cap="flat" cmpd="sng" algn="ctr">
                       <a:solidFill>
-                        <a:srgbClr val="EBDCD6"/>
+                        <a:srgbClr val="F6DFD5"/>
                       </a:solidFill>
                       <a:prstDash val="solid"/>
                     </a:lnB>
                     <a:solidFill>
-                      <a:srgbClr val="F8F4F2"/>
+                      <a:srgbClr val="FBF1EC"/>
                     </a:solidFill>
                   </a:tcPr>
                 </a:tc>
@@ -3930,7 +4060,7 @@
                       <a:r>
                         <a:rPr sz="1500" b="1">
                           <a:solidFill>
-                            <a:srgbClr val="422D24"/>
+                            <a:srgbClr val="493127"/>
                           </a:solidFill>
                         </a:rPr>
                         <a:t>좋아하는 것</a:t>
@@ -3940,30 +4070,30 @@
                   <a:tcPr anchor="ctr" marL="73152" marR="73152">
                     <a:lnL w="9525" cap="flat" cmpd="sng" algn="ctr">
                       <a:solidFill>
-                        <a:srgbClr val="EBDCD6"/>
+                        <a:srgbClr val="F6DFD5"/>
                       </a:solidFill>
                       <a:prstDash val="solid"/>
                     </a:lnL>
                     <a:lnR w="9525" cap="flat" cmpd="sng" algn="ctr">
                       <a:solidFill>
-                        <a:srgbClr val="EBDCD6"/>
+                        <a:srgbClr val="F6DFD5"/>
                       </a:solidFill>
                       <a:prstDash val="solid"/>
                     </a:lnR>
                     <a:lnT w="9525" cap="flat" cmpd="sng" algn="ctr">
                       <a:solidFill>
-                        <a:srgbClr val="EBDCD6"/>
+                        <a:srgbClr val="F6DFD5"/>
                       </a:solidFill>
                       <a:prstDash val="solid"/>
                     </a:lnT>
                     <a:lnB w="9525" cap="flat" cmpd="sng" algn="ctr">
                       <a:solidFill>
-                        <a:srgbClr val="EBDCD6"/>
+                        <a:srgbClr val="F6DFD5"/>
                       </a:solidFill>
                       <a:prstDash val="solid"/>
                     </a:lnB>
                     <a:solidFill>
-                      <a:srgbClr val="EBDCD6"/>
+                      <a:srgbClr val="F6DFD5"/>
                     </a:solidFill>
                   </a:tcPr>
                 </a:tc>
@@ -3976,7 +4106,7 @@
                       <a:r>
                         <a:rPr sz="1500" b="0">
                           <a:solidFill>
-                            <a:srgbClr val="2B2B2B"/>
+                            <a:srgbClr val="26231F"/>
                           </a:solidFill>
                         </a:rPr>
                         <a:t>입력하세요</a:t>
@@ -3986,25 +4116,25 @@
                   <a:tcPr anchor="ctr" marL="73152" marR="73152">
                     <a:lnL w="9525" cap="flat" cmpd="sng" algn="ctr">
                       <a:solidFill>
-                        <a:srgbClr val="EBDCD6"/>
+                        <a:srgbClr val="F6DFD5"/>
                       </a:solidFill>
                       <a:prstDash val="solid"/>
                     </a:lnL>
                     <a:lnR w="9525" cap="flat" cmpd="sng" algn="ctr">
                       <a:solidFill>
-                        <a:srgbClr val="EBDCD6"/>
+                        <a:srgbClr val="F6DFD5"/>
                       </a:solidFill>
                       <a:prstDash val="solid"/>
                     </a:lnR>
                     <a:lnT w="9525" cap="flat" cmpd="sng" algn="ctr">
                       <a:solidFill>
-                        <a:srgbClr val="EBDCD6"/>
+                        <a:srgbClr val="F6DFD5"/>
                       </a:solidFill>
                       <a:prstDash val="solid"/>
                     </a:lnT>
                     <a:lnB w="9525" cap="flat" cmpd="sng" algn="ctr">
                       <a:solidFill>
-                        <a:srgbClr val="EBDCD6"/>
+                        <a:srgbClr val="F6DFD5"/>
                       </a:solidFill>
                       <a:prstDash val="solid"/>
                     </a:lnB>
@@ -4024,7 +4154,7 @@
                       <a:r>
                         <a:rPr sz="1500" b="1">
                           <a:solidFill>
-                            <a:srgbClr val="422D24"/>
+                            <a:srgbClr val="493127"/>
                           </a:solidFill>
                         </a:rPr>
                         <a:t>별명</a:t>
@@ -4034,30 +4164,30 @@
                   <a:tcPr anchor="ctr" marL="73152" marR="73152">
                     <a:lnL w="9525" cap="flat" cmpd="sng" algn="ctr">
                       <a:solidFill>
-                        <a:srgbClr val="EBDCD6"/>
+                        <a:srgbClr val="F6DFD5"/>
                       </a:solidFill>
                       <a:prstDash val="solid"/>
                     </a:lnL>
                     <a:lnR w="9525" cap="flat" cmpd="sng" algn="ctr">
                       <a:solidFill>
-                        <a:srgbClr val="EBDCD6"/>
+                        <a:srgbClr val="F6DFD5"/>
                       </a:solidFill>
                       <a:prstDash val="solid"/>
                     </a:lnR>
                     <a:lnT w="9525" cap="flat" cmpd="sng" algn="ctr">
                       <a:solidFill>
-                        <a:srgbClr val="EBDCD6"/>
+                        <a:srgbClr val="F6DFD5"/>
                       </a:solidFill>
                       <a:prstDash val="solid"/>
                     </a:lnT>
                     <a:lnB w="9525" cap="flat" cmpd="sng" algn="ctr">
                       <a:solidFill>
-                        <a:srgbClr val="EBDCD6"/>
+                        <a:srgbClr val="F6DFD5"/>
                       </a:solidFill>
                       <a:prstDash val="solid"/>
                     </a:lnB>
                     <a:solidFill>
-                      <a:srgbClr val="EBDCD6"/>
+                      <a:srgbClr val="F6DFD5"/>
                     </a:solidFill>
                   </a:tcPr>
                 </a:tc>
@@ -4070,7 +4200,7 @@
                       <a:r>
                         <a:rPr sz="1500" b="0">
                           <a:solidFill>
-                            <a:srgbClr val="2B2B2B"/>
+                            <a:srgbClr val="26231F"/>
                           </a:solidFill>
                         </a:rPr>
                         <a:t>입력하세요</a:t>
@@ -4080,30 +4210,30 @@
                   <a:tcPr anchor="ctr" marL="73152" marR="73152">
                     <a:lnL w="9525" cap="flat" cmpd="sng" algn="ctr">
                       <a:solidFill>
-                        <a:srgbClr val="EBDCD6"/>
+                        <a:srgbClr val="F6DFD5"/>
                       </a:solidFill>
                       <a:prstDash val="solid"/>
                     </a:lnL>
                     <a:lnR w="9525" cap="flat" cmpd="sng" algn="ctr">
                       <a:solidFill>
-                        <a:srgbClr val="EBDCD6"/>
+                        <a:srgbClr val="F6DFD5"/>
                       </a:solidFill>
                       <a:prstDash val="solid"/>
                     </a:lnR>
                     <a:lnT w="9525" cap="flat" cmpd="sng" algn="ctr">
                       <a:solidFill>
-                        <a:srgbClr val="EBDCD6"/>
+                        <a:srgbClr val="F6DFD5"/>
                       </a:solidFill>
                       <a:prstDash val="solid"/>
                     </a:lnT>
                     <a:lnB w="9525" cap="flat" cmpd="sng" algn="ctr">
                       <a:solidFill>
-                        <a:srgbClr val="EBDCD6"/>
+                        <a:srgbClr val="F6DFD5"/>
                       </a:solidFill>
                       <a:prstDash val="solid"/>
                     </a:lnB>
                     <a:solidFill>
-                      <a:srgbClr val="F8F4F2"/>
+                      <a:srgbClr val="FBF1EC"/>
                     </a:solidFill>
                   </a:tcPr>
                 </a:tc>
@@ -4118,7 +4248,7 @@
                       <a:r>
                         <a:rPr sz="1500" b="1">
                           <a:solidFill>
-                            <a:srgbClr val="422D24"/>
+                            <a:srgbClr val="493127"/>
                           </a:solidFill>
                         </a:rPr>
                         <a:t>부모의 마음</a:t>
@@ -4128,30 +4258,30 @@
                   <a:tcPr anchor="ctr" marL="73152" marR="73152">
                     <a:lnL w="9525" cap="flat" cmpd="sng" algn="ctr">
                       <a:solidFill>
-                        <a:srgbClr val="EBDCD6"/>
+                        <a:srgbClr val="F6DFD5"/>
                       </a:solidFill>
                       <a:prstDash val="solid"/>
                     </a:lnL>
                     <a:lnR w="9525" cap="flat" cmpd="sng" algn="ctr">
                       <a:solidFill>
-                        <a:srgbClr val="EBDCD6"/>
+                        <a:srgbClr val="F6DFD5"/>
                       </a:solidFill>
                       <a:prstDash val="solid"/>
                     </a:lnR>
                     <a:lnT w="9525" cap="flat" cmpd="sng" algn="ctr">
                       <a:solidFill>
-                        <a:srgbClr val="EBDCD6"/>
+                        <a:srgbClr val="F6DFD5"/>
                       </a:solidFill>
                       <a:prstDash val="solid"/>
                     </a:lnT>
                     <a:lnB w="9525" cap="flat" cmpd="sng" algn="ctr">
                       <a:solidFill>
-                        <a:srgbClr val="EBDCD6"/>
+                        <a:srgbClr val="F6DFD5"/>
                       </a:solidFill>
                       <a:prstDash val="solid"/>
                     </a:lnB>
                     <a:solidFill>
-                      <a:srgbClr val="EBDCD6"/>
+                      <a:srgbClr val="F6DFD5"/>
                     </a:solidFill>
                   </a:tcPr>
                 </a:tc>
@@ -4164,7 +4294,7 @@
                       <a:r>
                         <a:rPr sz="1500" b="0">
                           <a:solidFill>
-                            <a:srgbClr val="2B2B2B"/>
+                            <a:srgbClr val="26231F"/>
                           </a:solidFill>
                         </a:rPr>
                         <a:t>입력하세요</a:t>
@@ -4174,25 +4304,25 @@
                   <a:tcPr anchor="ctr" marL="73152" marR="73152">
                     <a:lnL w="9525" cap="flat" cmpd="sng" algn="ctr">
                       <a:solidFill>
-                        <a:srgbClr val="EBDCD6"/>
+                        <a:srgbClr val="F6DFD5"/>
                       </a:solidFill>
                       <a:prstDash val="solid"/>
                     </a:lnL>
                     <a:lnR w="9525" cap="flat" cmpd="sng" algn="ctr">
                       <a:solidFill>
-                        <a:srgbClr val="EBDCD6"/>
+                        <a:srgbClr val="F6DFD5"/>
                       </a:solidFill>
                       <a:prstDash val="solid"/>
                     </a:lnR>
                     <a:lnT w="9525" cap="flat" cmpd="sng" algn="ctr">
                       <a:solidFill>
-                        <a:srgbClr val="EBDCD6"/>
+                        <a:srgbClr val="F6DFD5"/>
                       </a:solidFill>
                       <a:prstDash val="solid"/>
                     </a:lnT>
                     <a:lnB w="9525" cap="flat" cmpd="sng" algn="ctr">
                       <a:solidFill>
-                        <a:srgbClr val="EBDCD6"/>
+                        <a:srgbClr val="F6DFD5"/>
                       </a:solidFill>
                       <a:prstDash val="solid"/>
                     </a:lnB>
@@ -4220,7 +4350,7 @@
     <p:bg>
       <p:bgPr>
         <a:solidFill>
-          <a:srgbClr val="FFFFFF"/>
+          <a:srgbClr val="F6DFD5"/>
         </a:solidFill>
         <a:effectLst/>
       </p:bgPr>
@@ -4240,14 +4370,14 @@
         </p:nvSpPr>
         <p:spPr>
           <a:xfrm>
-            <a:off x="9905695" y="-1463040"/>
-            <a:ext cx="3840480" cy="3840480"/>
-          </a:xfrm>
-          <a:prstGeom prst="ellipse">
+            <a:off x="640080" y="6400800"/>
+            <a:ext cx="10911535" cy="10972"/>
+          </a:xfrm>
+          <a:prstGeom prst="rect">
             <a:avLst/>
           </a:prstGeom>
           <a:solidFill>
-            <a:srgbClr val="EBDCD6"/>
+            <a:srgbClr val="26231F"/>
           </a:solidFill>
           <a:ln>
             <a:noFill/>
@@ -4263,20 +4393,58 @@
       </p:sp>
       <p:sp>
         <p:nvSpPr>
-          <p:cNvPr id="4" name="장식"/>
+          <p:cNvPr id="4" name="하단 라벨"/>
+          <p:cNvSpPr txBox="1"/>
+          <p:nvPr/>
+        </p:nvSpPr>
+        <p:spPr>
+          <a:xfrm>
+            <a:off x="640080" y="6437376"/>
+            <a:ext cx="5486400" cy="274320"/>
+          </a:xfrm>
+          <a:prstGeom prst="rect">
+            <a:avLst/>
+          </a:prstGeom>
+          <a:noFill/>
+        </p:spPr>
+        <p:txBody>
+          <a:bodyPr wrap="square" lIns="54864" rIns="54864" tIns="27432" bIns="27432" anchor="ctr">
+            <a:noAutofit/>
+          </a:bodyPr>
+          <a:lstStyle/>
+          <a:p>
+            <a:pPr algn="l">
+              <a:lnSpc>
+                <a:spcPct val="115000"/>
+              </a:lnSpc>
+            </a:pPr>
+            <a:r>
+              <a:rPr sz="900" b="1" i="0" spc="250">
+                <a:solidFill>
+                  <a:srgbClr val="26231F"/>
+                </a:solidFill>
+              </a:rPr>
+              <a:t>FIRST BIRTHDAY</a:t>
+            </a:r>
+          </a:p>
+        </p:txBody>
+      </p:sp>
+      <p:sp>
+        <p:nvSpPr>
+          <p:cNvPr id="5" name="포인트"/>
           <p:cNvSpPr/>
           <p:nvPr/>
         </p:nvSpPr>
         <p:spPr>
-          <a:xfrm>
-            <a:off x="11094415" y="274320"/>
-            <a:ext cx="411480" cy="411480"/>
-          </a:xfrm>
-          <a:prstGeom prst="ellipse">
+          <a:xfrm rot="18900000">
+            <a:off x="11213287" y="6473952"/>
+            <a:ext cx="219456" cy="219456"/>
+          </a:xfrm>
+          <a:prstGeom prst="teardrop">
             <a:avLst/>
           </a:prstGeom>
           <a:solidFill>
-            <a:srgbClr val="855A47"/>
+            <a:srgbClr val="D89579"/>
           </a:solidFill>
           <a:ln>
             <a:noFill/>
@@ -4302,8 +4470,8 @@
         </p:nvSpPr>
         <p:spPr>
           <a:xfrm>
-            <a:off x="640080" y="457200"/>
-            <a:ext cx="9722815" cy="868680"/>
+            <a:off x="640080" y="502920"/>
+            <a:ext cx="10911535" cy="914400"/>
           </a:xfrm>
         </p:spPr>
         <p:txBody>
@@ -4320,7 +4488,7 @@
             <a:r>
               <a:rPr sz="3000" b="1" i="0">
                 <a:solidFill>
-                  <a:srgbClr val="422D24"/>
+                  <a:srgbClr val="26231F"/>
                 </a:solidFill>
               </a:rPr>
               <a:t>첫 번째 생일 사진</a:t>
@@ -4330,14 +4498,14 @@
       </p:sp>
       <p:sp>
         <p:nvSpPr>
-          <p:cNvPr id="5" name="사진 자리"/>
+          <p:cNvPr id="6" name="사진 자리"/>
           <p:cNvSpPr/>
           <p:nvPr/>
         </p:nvSpPr>
         <p:spPr>
           <a:xfrm>
             <a:off x="640080" y="1600200"/>
-            <a:ext cx="5318607" cy="4800600"/>
+            <a:ext cx="5318607" cy="4572000"/>
           </a:xfrm>
           <a:prstGeom prst="roundRect">
             <a:avLst>
@@ -4345,12 +4513,10 @@
             </a:avLst>
           </a:prstGeom>
           <a:solidFill>
-            <a:srgbClr val="EBDCD6"/>
+            <a:srgbClr val="F6DFD5"/>
           </a:solidFill>
           <a:ln w="19050">
-            <a:solidFill>
-              <a:srgbClr val="855A47"/>
-            </a:solidFill>
+            <a:noFill/>
             <a:prstDash val="dash"/>
           </a:ln>
         </p:spPr>
@@ -4368,7 +4534,7 @@
             <a:r>
               <a:rPr sz="1400" b="0" i="0">
                 <a:solidFill>
-                  <a:srgbClr val="422D24"/>
+                  <a:srgbClr val="8E8780"/>
                 </a:solidFill>
               </a:rPr>
               <a:t>대표 사진 1</a:t>
@@ -4378,14 +4544,14 @@
       </p:sp>
       <p:sp>
         <p:nvSpPr>
-          <p:cNvPr id="6" name="사진 자리"/>
+          <p:cNvPr id="7" name="사진 자리"/>
           <p:cNvSpPr/>
           <p:nvPr/>
         </p:nvSpPr>
         <p:spPr>
           <a:xfrm>
             <a:off x="6233007" y="1600200"/>
-            <a:ext cx="5318607" cy="4800600"/>
+            <a:ext cx="5318607" cy="4572000"/>
           </a:xfrm>
           <a:prstGeom prst="roundRect">
             <a:avLst>
@@ -4393,12 +4559,10 @@
             </a:avLst>
           </a:prstGeom>
           <a:solidFill>
-            <a:srgbClr val="EBDCD6"/>
+            <a:srgbClr val="F6DFD5"/>
           </a:solidFill>
           <a:ln w="19050">
-            <a:solidFill>
-              <a:srgbClr val="855A47"/>
-            </a:solidFill>
+            <a:noFill/>
             <a:prstDash val="dash"/>
           </a:ln>
         </p:spPr>
@@ -4416,7 +4580,7 @@
             <a:r>
               <a:rPr sz="1400" b="0" i="0">
                 <a:solidFill>
-                  <a:srgbClr val="422D24"/>
+                  <a:srgbClr val="8E8780"/>
                 </a:solidFill>
               </a:rPr>
               <a:t>대표 사진 2</a:t>
@@ -4438,7 +4602,7 @@
     <p:bg>
       <p:bgPr>
         <a:solidFill>
-          <a:srgbClr val="FFFFFF"/>
+          <a:srgbClr val="F6DFD5"/>
         </a:solidFill>
         <a:effectLst/>
       </p:bgPr>
@@ -4458,14 +4622,14 @@
         </p:nvSpPr>
         <p:spPr>
           <a:xfrm>
-            <a:off x="9905695" y="-1463040"/>
-            <a:ext cx="3840480" cy="3840480"/>
-          </a:xfrm>
-          <a:prstGeom prst="ellipse">
+            <a:off x="640080" y="6400800"/>
+            <a:ext cx="10911535" cy="10972"/>
+          </a:xfrm>
+          <a:prstGeom prst="rect">
             <a:avLst/>
           </a:prstGeom>
           <a:solidFill>
-            <a:srgbClr val="EBDCD6"/>
+            <a:srgbClr val="26231F"/>
           </a:solidFill>
           <a:ln>
             <a:noFill/>
@@ -4481,20 +4645,58 @@
       </p:sp>
       <p:sp>
         <p:nvSpPr>
-          <p:cNvPr id="4" name="장식"/>
+          <p:cNvPr id="4" name="하단 라벨"/>
+          <p:cNvSpPr txBox="1"/>
+          <p:nvPr/>
+        </p:nvSpPr>
+        <p:spPr>
+          <a:xfrm>
+            <a:off x="640080" y="6437376"/>
+            <a:ext cx="5486400" cy="274320"/>
+          </a:xfrm>
+          <a:prstGeom prst="rect">
+            <a:avLst/>
+          </a:prstGeom>
+          <a:noFill/>
+        </p:spPr>
+        <p:txBody>
+          <a:bodyPr wrap="square" lIns="54864" rIns="54864" tIns="27432" bIns="27432" anchor="ctr">
+            <a:noAutofit/>
+          </a:bodyPr>
+          <a:lstStyle/>
+          <a:p>
+            <a:pPr algn="l">
+              <a:lnSpc>
+                <a:spcPct val="115000"/>
+              </a:lnSpc>
+            </a:pPr>
+            <a:r>
+              <a:rPr sz="900" b="1" i="0" spc="250">
+                <a:solidFill>
+                  <a:srgbClr val="26231F"/>
+                </a:solidFill>
+              </a:rPr>
+              <a:t>FIRST BIRTHDAY</a:t>
+            </a:r>
+          </a:p>
+        </p:txBody>
+      </p:sp>
+      <p:sp>
+        <p:nvSpPr>
+          <p:cNvPr id="5" name="포인트"/>
           <p:cNvSpPr/>
           <p:nvPr/>
         </p:nvSpPr>
         <p:spPr>
-          <a:xfrm>
-            <a:off x="11094415" y="274320"/>
-            <a:ext cx="411480" cy="411480"/>
-          </a:xfrm>
-          <a:prstGeom prst="ellipse">
+          <a:xfrm rot="18900000">
+            <a:off x="11213287" y="6473952"/>
+            <a:ext cx="219456" cy="219456"/>
+          </a:xfrm>
+          <a:prstGeom prst="teardrop">
             <a:avLst/>
           </a:prstGeom>
           <a:solidFill>
-            <a:srgbClr val="855A47"/>
+            <a:srgbClr val="D89579"/>
           </a:solidFill>
           <a:ln>
             <a:noFill/>
@@ -4520,8 +4722,8 @@
         </p:nvSpPr>
         <p:spPr>
           <a:xfrm>
-            <a:off x="640080" y="457200"/>
-            <a:ext cx="9722815" cy="868680"/>
+            <a:off x="640080" y="502920"/>
+            <a:ext cx="10911535" cy="914400"/>
           </a:xfrm>
         </p:spPr>
         <p:txBody>
@@ -4538,7 +4740,7 @@
             <a:r>
               <a:rPr sz="3000" b="1" i="0">
                 <a:solidFill>
-                  <a:srgbClr val="422D24"/>
+                  <a:srgbClr val="26231F"/>
                 </a:solidFill>
               </a:rPr>
               <a:t>한 해의 순간들</a:t>
@@ -4548,14 +4750,14 @@
       </p:sp>
       <p:sp>
         <p:nvSpPr>
-          <p:cNvPr id="5" name="사진 자리"/>
+          <p:cNvPr id="6" name="사진 자리"/>
           <p:cNvSpPr/>
           <p:nvPr/>
         </p:nvSpPr>
         <p:spPr>
           <a:xfrm>
             <a:off x="640080" y="1600200"/>
-            <a:ext cx="3515258" cy="2308860"/>
+            <a:ext cx="3515258" cy="2194560"/>
           </a:xfrm>
           <a:prstGeom prst="roundRect">
             <a:avLst>
@@ -4563,12 +4765,10 @@
             </a:avLst>
           </a:prstGeom>
           <a:solidFill>
-            <a:srgbClr val="EBDCD6"/>
+            <a:srgbClr val="F6DFD5"/>
           </a:solidFill>
           <a:ln w="19050">
-            <a:solidFill>
-              <a:srgbClr val="855A47"/>
-            </a:solidFill>
+            <a:noFill/>
             <a:prstDash val="dash"/>
           </a:ln>
         </p:spPr>
@@ -4586,7 +4786,7 @@
             <a:r>
               <a:rPr sz="1200" b="0" i="0">
                 <a:solidFill>
-                  <a:srgbClr val="422D24"/>
+                  <a:srgbClr val="8E8780"/>
                 </a:solidFill>
               </a:rPr>
               <a:t>사진 1</a:t>
@@ -4596,14 +4796,14 @@
       </p:sp>
       <p:sp>
         <p:nvSpPr>
-          <p:cNvPr id="6" name="사진 자리"/>
+          <p:cNvPr id="7" name="사진 자리"/>
           <p:cNvSpPr/>
           <p:nvPr/>
         </p:nvSpPr>
         <p:spPr>
           <a:xfrm>
             <a:off x="4338218" y="1600200"/>
-            <a:ext cx="3515258" cy="2308860"/>
+            <a:ext cx="3515258" cy="2194560"/>
           </a:xfrm>
           <a:prstGeom prst="roundRect">
             <a:avLst>
@@ -4611,12 +4811,10 @@
             </a:avLst>
           </a:prstGeom>
           <a:solidFill>
-            <a:srgbClr val="EBDCD6"/>
+            <a:srgbClr val="F6DFD5"/>
           </a:solidFill>
           <a:ln w="19050">
-            <a:solidFill>
-              <a:srgbClr val="855A47"/>
-            </a:solidFill>
+            <a:noFill/>
             <a:prstDash val="dash"/>
           </a:ln>
         </p:spPr>
@@ -4634,7 +4832,7 @@
             <a:r>
               <a:rPr sz="1200" b="0" i="0">
                 <a:solidFill>
-                  <a:srgbClr val="422D24"/>
+                  <a:srgbClr val="8E8780"/>
                 </a:solidFill>
               </a:rPr>
               <a:t>사진 2</a:t>
@@ -4644,14 +4842,14 @@
       </p:sp>
       <p:sp>
         <p:nvSpPr>
-          <p:cNvPr id="7" name="사진 자리"/>
+          <p:cNvPr id="8" name="사진 자리"/>
           <p:cNvSpPr/>
           <p:nvPr/>
         </p:nvSpPr>
         <p:spPr>
           <a:xfrm>
             <a:off x="8036356" y="1600200"/>
-            <a:ext cx="3515258" cy="2308860"/>
+            <a:ext cx="3515258" cy="2194560"/>
           </a:xfrm>
           <a:prstGeom prst="roundRect">
             <a:avLst>
@@ -4659,12 +4857,10 @@
             </a:avLst>
           </a:prstGeom>
           <a:solidFill>
-            <a:srgbClr val="EBDCD6"/>
+            <a:srgbClr val="F6DFD5"/>
           </a:solidFill>
           <a:ln w="19050">
-            <a:solidFill>
-              <a:srgbClr val="855A47"/>
-            </a:solidFill>
+            <a:noFill/>
             <a:prstDash val="dash"/>
           </a:ln>
         </p:spPr>
@@ -4682,7 +4878,7 @@
             <a:r>
               <a:rPr sz="1200" b="0" i="0">
                 <a:solidFill>
-                  <a:srgbClr val="422D24"/>
+                  <a:srgbClr val="8E8780"/>
                 </a:solidFill>
               </a:rPr>
               <a:t>사진 3</a:t>
@@ -4692,14 +4888,14 @@
       </p:sp>
       <p:sp>
         <p:nvSpPr>
-          <p:cNvPr id="8" name="사진 자리"/>
+          <p:cNvPr id="9" name="사진 자리"/>
           <p:cNvSpPr/>
           <p:nvPr/>
         </p:nvSpPr>
         <p:spPr>
           <a:xfrm>
-            <a:off x="640080" y="4091939"/>
-            <a:ext cx="3515258" cy="2308860"/>
+            <a:off x="640080" y="3977639"/>
+            <a:ext cx="3515258" cy="2194560"/>
           </a:xfrm>
           <a:prstGeom prst="roundRect">
             <a:avLst>
@@ -4707,12 +4903,10 @@
             </a:avLst>
           </a:prstGeom>
           <a:solidFill>
-            <a:srgbClr val="EBDCD6"/>
+            <a:srgbClr val="F6DFD5"/>
           </a:solidFill>
           <a:ln w="19050">
-            <a:solidFill>
-              <a:srgbClr val="855A47"/>
-            </a:solidFill>
+            <a:noFill/>
             <a:prstDash val="dash"/>
           </a:ln>
         </p:spPr>
@@ -4730,7 +4924,7 @@
             <a:r>
               <a:rPr sz="1200" b="0" i="0">
                 <a:solidFill>
-                  <a:srgbClr val="422D24"/>
+                  <a:srgbClr val="8E8780"/>
                 </a:solidFill>
               </a:rPr>
               <a:t>사진 4</a:t>
@@ -4740,14 +4934,14 @@
       </p:sp>
       <p:sp>
         <p:nvSpPr>
-          <p:cNvPr id="9" name="사진 자리"/>
+          <p:cNvPr id="10" name="사진 자리"/>
           <p:cNvSpPr/>
           <p:nvPr/>
         </p:nvSpPr>
         <p:spPr>
           <a:xfrm>
-            <a:off x="4338218" y="4091939"/>
-            <a:ext cx="3515258" cy="2308860"/>
+            <a:off x="4338218" y="3977639"/>
+            <a:ext cx="3515258" cy="2194560"/>
           </a:xfrm>
           <a:prstGeom prst="roundRect">
             <a:avLst>
@@ -4755,12 +4949,10 @@
             </a:avLst>
           </a:prstGeom>
           <a:solidFill>
-            <a:srgbClr val="EBDCD6"/>
+            <a:srgbClr val="F6DFD5"/>
           </a:solidFill>
           <a:ln w="19050">
-            <a:solidFill>
-              <a:srgbClr val="855A47"/>
-            </a:solidFill>
+            <a:noFill/>
             <a:prstDash val="dash"/>
           </a:ln>
         </p:spPr>
@@ -4778,7 +4970,7 @@
             <a:r>
               <a:rPr sz="1200" b="0" i="0">
                 <a:solidFill>
-                  <a:srgbClr val="422D24"/>
+                  <a:srgbClr val="8E8780"/>
                 </a:solidFill>
               </a:rPr>
               <a:t>사진 5</a:t>
@@ -4788,14 +4980,14 @@
       </p:sp>
       <p:sp>
         <p:nvSpPr>
-          <p:cNvPr id="10" name="사진 자리"/>
+          <p:cNvPr id="11" name="사진 자리"/>
           <p:cNvSpPr/>
           <p:nvPr/>
         </p:nvSpPr>
         <p:spPr>
           <a:xfrm>
-            <a:off x="8036356" y="4091939"/>
-            <a:ext cx="3515258" cy="2308860"/>
+            <a:off x="8036356" y="3977639"/>
+            <a:ext cx="3515258" cy="2194560"/>
           </a:xfrm>
           <a:prstGeom prst="roundRect">
             <a:avLst>
@@ -4803,12 +4995,10 @@
             </a:avLst>
           </a:prstGeom>
           <a:solidFill>
-            <a:srgbClr val="EBDCD6"/>
+            <a:srgbClr val="F6DFD5"/>
           </a:solidFill>
           <a:ln w="19050">
-            <a:solidFill>
-              <a:srgbClr val="855A47"/>
-            </a:solidFill>
+            <a:noFill/>
             <a:prstDash val="dash"/>
           </a:ln>
         </p:spPr>
@@ -4826,7 +5016,7 @@
             <a:r>
               <a:rPr sz="1200" b="0" i="0">
                 <a:solidFill>
-                  <a:srgbClr val="422D24"/>
+                  <a:srgbClr val="8E8780"/>
                 </a:solidFill>
               </a:rPr>
               <a:t>사진 6</a:t>
@@ -4848,7 +5038,7 @@
     <p:bg>
       <p:bgPr>
         <a:solidFill>
-          <a:srgbClr val="FFFFFF"/>
+          <a:srgbClr val="F6DFD5"/>
         </a:solidFill>
         <a:effectLst/>
       </p:bgPr>
@@ -4868,14 +5058,14 @@
         </p:nvSpPr>
         <p:spPr>
           <a:xfrm>
-            <a:off x="9905695" y="-1463040"/>
-            <a:ext cx="3840480" cy="3840480"/>
-          </a:xfrm>
-          <a:prstGeom prst="ellipse">
+            <a:off x="640080" y="6400800"/>
+            <a:ext cx="10911535" cy="10972"/>
+          </a:xfrm>
+          <a:prstGeom prst="rect">
             <a:avLst/>
           </a:prstGeom>
           <a:solidFill>
-            <a:srgbClr val="EBDCD6"/>
+            <a:srgbClr val="26231F"/>
           </a:solidFill>
           <a:ln>
             <a:noFill/>
@@ -4891,20 +5081,58 @@
       </p:sp>
       <p:sp>
         <p:nvSpPr>
-          <p:cNvPr id="4" name="장식"/>
+          <p:cNvPr id="4" name="하단 라벨"/>
+          <p:cNvSpPr txBox="1"/>
+          <p:nvPr/>
+        </p:nvSpPr>
+        <p:spPr>
+          <a:xfrm>
+            <a:off x="640080" y="6437376"/>
+            <a:ext cx="5486400" cy="274320"/>
+          </a:xfrm>
+          <a:prstGeom prst="rect">
+            <a:avLst/>
+          </a:prstGeom>
+          <a:noFill/>
+        </p:spPr>
+        <p:txBody>
+          <a:bodyPr wrap="square" lIns="54864" rIns="54864" tIns="27432" bIns="27432" anchor="ctr">
+            <a:noAutofit/>
+          </a:bodyPr>
+          <a:lstStyle/>
+          <a:p>
+            <a:pPr algn="l">
+              <a:lnSpc>
+                <a:spcPct val="115000"/>
+              </a:lnSpc>
+            </a:pPr>
+            <a:r>
+              <a:rPr sz="900" b="1" i="0" spc="250">
+                <a:solidFill>
+                  <a:srgbClr val="26231F"/>
+                </a:solidFill>
+              </a:rPr>
+              <a:t>FIRST BIRTHDAY</a:t>
+            </a:r>
+          </a:p>
+        </p:txBody>
+      </p:sp>
+      <p:sp>
+        <p:nvSpPr>
+          <p:cNvPr id="5" name="포인트"/>
           <p:cNvSpPr/>
           <p:nvPr/>
         </p:nvSpPr>
         <p:spPr>
-          <a:xfrm>
-            <a:off x="11094415" y="274320"/>
-            <a:ext cx="411480" cy="411480"/>
-          </a:xfrm>
-          <a:prstGeom prst="ellipse">
+          <a:xfrm rot="18900000">
+            <a:off x="11213287" y="6473952"/>
+            <a:ext cx="219456" cy="219456"/>
+          </a:xfrm>
+          <a:prstGeom prst="teardrop">
             <a:avLst/>
           </a:prstGeom>
           <a:solidFill>
-            <a:srgbClr val="855A47"/>
+            <a:srgbClr val="D89579"/>
           </a:solidFill>
           <a:ln>
             <a:noFill/>
@@ -4930,8 +5158,8 @@
         </p:nvSpPr>
         <p:spPr>
           <a:xfrm>
-            <a:off x="640080" y="457200"/>
-            <a:ext cx="9722815" cy="868680"/>
+            <a:off x="640080" y="502920"/>
+            <a:ext cx="10911535" cy="914400"/>
           </a:xfrm>
         </p:spPr>
         <p:txBody>
@@ -4948,7 +5176,7 @@
             <a:r>
               <a:rPr sz="3000" b="1" i="0">
                 <a:solidFill>
-                  <a:srgbClr val="422D24"/>
+                  <a:srgbClr val="26231F"/>
                 </a:solidFill>
               </a:rPr>
               <a:t>사진 모음</a:t>
@@ -4958,14 +5186,14 @@
       </p:sp>
       <p:sp>
         <p:nvSpPr>
-          <p:cNvPr id="5" name="사진 자리"/>
+          <p:cNvPr id="6" name="사진 자리"/>
           <p:cNvSpPr/>
           <p:nvPr/>
         </p:nvSpPr>
         <p:spPr>
           <a:xfrm>
             <a:off x="640080" y="1600200"/>
-            <a:ext cx="2590723" cy="2308860"/>
+            <a:ext cx="2590723" cy="2194560"/>
           </a:xfrm>
           <a:prstGeom prst="roundRect">
             <a:avLst>
@@ -4973,12 +5201,10 @@
             </a:avLst>
           </a:prstGeom>
           <a:solidFill>
-            <a:srgbClr val="EBDCD6"/>
+            <a:srgbClr val="F6DFD5"/>
           </a:solidFill>
           <a:ln w="19050">
-            <a:solidFill>
-              <a:srgbClr val="855A47"/>
-            </a:solidFill>
+            <a:noFill/>
             <a:prstDash val="dash"/>
           </a:ln>
         </p:spPr>
@@ -4996,7 +5222,7 @@
             <a:r>
               <a:rPr sz="1200" b="0" i="0">
                 <a:solidFill>
-                  <a:srgbClr val="422D24"/>
+                  <a:srgbClr val="8E8780"/>
                 </a:solidFill>
               </a:rPr>
               <a:t>사진 1</a:t>
@@ -5006,14 +5232,14 @@
       </p:sp>
       <p:sp>
         <p:nvSpPr>
-          <p:cNvPr id="6" name="사진 자리"/>
+          <p:cNvPr id="7" name="사진 자리"/>
           <p:cNvSpPr/>
           <p:nvPr/>
         </p:nvSpPr>
         <p:spPr>
           <a:xfrm>
             <a:off x="3413683" y="1600200"/>
-            <a:ext cx="2590723" cy="2308860"/>
+            <a:ext cx="2590723" cy="2194560"/>
           </a:xfrm>
           <a:prstGeom prst="roundRect">
             <a:avLst>
@@ -5021,12 +5247,10 @@
             </a:avLst>
           </a:prstGeom>
           <a:solidFill>
-            <a:srgbClr val="EBDCD6"/>
+            <a:srgbClr val="F6DFD5"/>
           </a:solidFill>
           <a:ln w="19050">
-            <a:solidFill>
-              <a:srgbClr val="855A47"/>
-            </a:solidFill>
+            <a:noFill/>
             <a:prstDash val="dash"/>
           </a:ln>
         </p:spPr>
@@ -5044,7 +5268,7 @@
             <a:r>
               <a:rPr sz="1200" b="0" i="0">
                 <a:solidFill>
-                  <a:srgbClr val="422D24"/>
+                  <a:srgbClr val="8E8780"/>
                 </a:solidFill>
               </a:rPr>
               <a:t>사진 2</a:t>
@@ -5054,14 +5278,14 @@
       </p:sp>
       <p:sp>
         <p:nvSpPr>
-          <p:cNvPr id="7" name="사진 자리"/>
+          <p:cNvPr id="8" name="사진 자리"/>
           <p:cNvSpPr/>
           <p:nvPr/>
         </p:nvSpPr>
         <p:spPr>
           <a:xfrm>
             <a:off x="6187287" y="1600200"/>
-            <a:ext cx="2590723" cy="2308860"/>
+            <a:ext cx="2590723" cy="2194560"/>
           </a:xfrm>
           <a:prstGeom prst="roundRect">
             <a:avLst>
@@ -5069,12 +5293,10 @@
             </a:avLst>
           </a:prstGeom>
           <a:solidFill>
-            <a:srgbClr val="EBDCD6"/>
+            <a:srgbClr val="F6DFD5"/>
           </a:solidFill>
           <a:ln w="19050">
-            <a:solidFill>
-              <a:srgbClr val="855A47"/>
-            </a:solidFill>
+            <a:noFill/>
             <a:prstDash val="dash"/>
           </a:ln>
         </p:spPr>
@@ -5092,7 +5314,7 @@
             <a:r>
               <a:rPr sz="1200" b="0" i="0">
                 <a:solidFill>
-                  <a:srgbClr val="422D24"/>
+                  <a:srgbClr val="8E8780"/>
                 </a:solidFill>
               </a:rPr>
               <a:t>사진 3</a:t>
@@ -5102,14 +5324,14 @@
       </p:sp>
       <p:sp>
         <p:nvSpPr>
-          <p:cNvPr id="8" name="사진 자리"/>
+          <p:cNvPr id="9" name="사진 자리"/>
           <p:cNvSpPr/>
           <p:nvPr/>
         </p:nvSpPr>
         <p:spPr>
           <a:xfrm>
             <a:off x="8960891" y="1600200"/>
-            <a:ext cx="2590723" cy="2308860"/>
+            <a:ext cx="2590723" cy="2194560"/>
           </a:xfrm>
           <a:prstGeom prst="roundRect">
             <a:avLst>
@@ -5117,12 +5339,10 @@
             </a:avLst>
           </a:prstGeom>
           <a:solidFill>
-            <a:srgbClr val="EBDCD6"/>
+            <a:srgbClr val="F6DFD5"/>
           </a:solidFill>
           <a:ln w="19050">
-            <a:solidFill>
-              <a:srgbClr val="855A47"/>
-            </a:solidFill>
+            <a:noFill/>
             <a:prstDash val="dash"/>
           </a:ln>
         </p:spPr>
@@ -5140,7 +5360,7 @@
             <a:r>
               <a:rPr sz="1200" b="0" i="0">
                 <a:solidFill>
-                  <a:srgbClr val="422D24"/>
+                  <a:srgbClr val="8E8780"/>
                 </a:solidFill>
               </a:rPr>
               <a:t>사진 4</a:t>
@@ -5150,14 +5370,14 @@
       </p:sp>
       <p:sp>
         <p:nvSpPr>
-          <p:cNvPr id="9" name="사진 자리"/>
+          <p:cNvPr id="10" name="사진 자리"/>
           <p:cNvSpPr/>
           <p:nvPr/>
         </p:nvSpPr>
         <p:spPr>
           <a:xfrm>
-            <a:off x="640080" y="4091939"/>
-            <a:ext cx="2590723" cy="2308860"/>
+            <a:off x="640080" y="3977639"/>
+            <a:ext cx="2590723" cy="2194560"/>
           </a:xfrm>
           <a:prstGeom prst="roundRect">
             <a:avLst>
@@ -5165,12 +5385,10 @@
             </a:avLst>
           </a:prstGeom>
           <a:solidFill>
-            <a:srgbClr val="EBDCD6"/>
+            <a:srgbClr val="F6DFD5"/>
           </a:solidFill>
           <a:ln w="19050">
-            <a:solidFill>
-              <a:srgbClr val="855A47"/>
-            </a:solidFill>
+            <a:noFill/>
             <a:prstDash val="dash"/>
           </a:ln>
         </p:spPr>
@@ -5188,7 +5406,7 @@
             <a:r>
               <a:rPr sz="1200" b="0" i="0">
                 <a:solidFill>
-                  <a:srgbClr val="422D24"/>
+                  <a:srgbClr val="8E8780"/>
                 </a:solidFill>
               </a:rPr>
               <a:t>사진 5</a:t>
@@ -5198,14 +5416,14 @@
       </p:sp>
       <p:sp>
         <p:nvSpPr>
-          <p:cNvPr id="10" name="사진 자리"/>
+          <p:cNvPr id="11" name="사진 자리"/>
           <p:cNvSpPr/>
           <p:nvPr/>
         </p:nvSpPr>
         <p:spPr>
           <a:xfrm>
-            <a:off x="3413683" y="4091939"/>
-            <a:ext cx="2590723" cy="2308860"/>
+            <a:off x="3413683" y="3977639"/>
+            <a:ext cx="2590723" cy="2194560"/>
           </a:xfrm>
           <a:prstGeom prst="roundRect">
             <a:avLst>
@@ -5213,12 +5431,10 @@
             </a:avLst>
           </a:prstGeom>
           <a:solidFill>
-            <a:srgbClr val="EBDCD6"/>
+            <a:srgbClr val="F6DFD5"/>
           </a:solidFill>
           <a:ln w="19050">
-            <a:solidFill>
-              <a:srgbClr val="855A47"/>
-            </a:solidFill>
+            <a:noFill/>
             <a:prstDash val="dash"/>
           </a:ln>
         </p:spPr>
@@ -5236,7 +5452,7 @@
             <a:r>
               <a:rPr sz="1200" b="0" i="0">
                 <a:solidFill>
-                  <a:srgbClr val="422D24"/>
+                  <a:srgbClr val="8E8780"/>
                 </a:solidFill>
               </a:rPr>
               <a:t>사진 6</a:t>
@@ -5246,14 +5462,14 @@
       </p:sp>
       <p:sp>
         <p:nvSpPr>
-          <p:cNvPr id="11" name="사진 자리"/>
+          <p:cNvPr id="12" name="사진 자리"/>
           <p:cNvSpPr/>
           <p:nvPr/>
         </p:nvSpPr>
         <p:spPr>
           <a:xfrm>
-            <a:off x="6187287" y="4091939"/>
-            <a:ext cx="2590723" cy="2308860"/>
+            <a:off x="6187287" y="3977639"/>
+            <a:ext cx="2590723" cy="2194560"/>
           </a:xfrm>
           <a:prstGeom prst="roundRect">
             <a:avLst>
@@ -5261,12 +5477,10 @@
             </a:avLst>
           </a:prstGeom>
           <a:solidFill>
-            <a:srgbClr val="EBDCD6"/>
+            <a:srgbClr val="F6DFD5"/>
           </a:solidFill>
           <a:ln w="19050">
-            <a:solidFill>
-              <a:srgbClr val="855A47"/>
-            </a:solidFill>
+            <a:noFill/>
             <a:prstDash val="dash"/>
           </a:ln>
         </p:spPr>
@@ -5284,7 +5498,7 @@
             <a:r>
               <a:rPr sz="1200" b="0" i="0">
                 <a:solidFill>
-                  <a:srgbClr val="422D24"/>
+                  <a:srgbClr val="8E8780"/>
                 </a:solidFill>
               </a:rPr>
               <a:t>사진 7</a:t>
@@ -5294,14 +5508,14 @@
       </p:sp>
       <p:sp>
         <p:nvSpPr>
-          <p:cNvPr id="12" name="사진 자리"/>
+          <p:cNvPr id="13" name="사진 자리"/>
           <p:cNvSpPr/>
           <p:nvPr/>
         </p:nvSpPr>
         <p:spPr>
           <a:xfrm>
-            <a:off x="8960891" y="4091939"/>
-            <a:ext cx="2590723" cy="2308860"/>
+            <a:off x="8960891" y="3977639"/>
+            <a:ext cx="2590723" cy="2194560"/>
           </a:xfrm>
           <a:prstGeom prst="roundRect">
             <a:avLst>
@@ -5309,12 +5523,10 @@
             </a:avLst>
           </a:prstGeom>
           <a:solidFill>
-            <a:srgbClr val="EBDCD6"/>
+            <a:srgbClr val="F6DFD5"/>
           </a:solidFill>
           <a:ln w="19050">
-            <a:solidFill>
-              <a:srgbClr val="855A47"/>
-            </a:solidFill>
+            <a:noFill/>
             <a:prstDash val="dash"/>
           </a:ln>
         </p:spPr>
@@ -5332,7 +5544,7 @@
             <a:r>
               <a:rPr sz="1200" b="0" i="0">
                 <a:solidFill>
-                  <a:srgbClr val="422D24"/>
+                  <a:srgbClr val="8E8780"/>
                 </a:solidFill>
               </a:rPr>
               <a:t>사진 8</a:t>
@@ -5351,6 +5563,14 @@
 <file path=ppt/slides/slide6.xml><?xml version="1.0" encoding="utf-8"?>
 <p:sld xmlns:a="http://schemas.openxmlformats.org/drawingml/2006/main" xmlns:p="http://schemas.openxmlformats.org/presentationml/2006/main" xmlns:r="http://schemas.openxmlformats.org/officeDocument/2006/relationships">
   <p:cSld>
+    <p:bg>
+      <p:bgPr>
+        <a:solidFill>
+          <a:srgbClr val="FBF1EC"/>
+        </a:solidFill>
+        <a:effectLst/>
+      </p:bgPr>
+    </p:bg>
     <p:spTree>
       <p:nvGrpSpPr>
         <p:cNvPr id="1" name=""/>
@@ -5358,30 +5578,116 @@
         <p:nvPr/>
       </p:nvGrpSpPr>
       <p:grpSpPr/>
-      <p:pic>
-        <p:nvPicPr>
-          <p:cNvPr id="3" name="표지 그림" descr="birthday-33.jpg"/>
-          <p:cNvPicPr>
-            <a:picLocks noChangeAspect="1"/>
-          </p:cNvPicPr>
+      <p:sp>
+        <p:nvSpPr>
+          <p:cNvPr id="3" name="사진 자리"/>
+          <p:cNvSpPr/>
           <p:nvPr/>
-        </p:nvPicPr>
-        <p:blipFill>
-          <a:blip r:embed="rId2"/>
-          <a:stretch>
-            <a:fillRect/>
-          </a:stretch>
-        </p:blipFill>
+        </p:nvSpPr>
         <p:spPr>
           <a:xfrm>
             <a:off x="0" y="0"/>
-            <a:ext cx="12191695" cy="6858000"/>
+            <a:ext cx="4389010" cy="6858000"/>
           </a:xfrm>
           <a:prstGeom prst="rect">
             <a:avLst/>
           </a:prstGeom>
-        </p:spPr>
-      </p:pic>
+          <a:solidFill>
+            <a:srgbClr val="EBC0AD"/>
+          </a:solidFill>
+          <a:ln>
+            <a:noFill/>
+          </a:ln>
+        </p:spPr>
+        <p:txBody>
+          <a:bodyPr rtlCol="0" anchor="ctr" wrap="square" lIns="54864" rIns="54864" tIns="27432" bIns="27432">
+            <a:noAutofit/>
+          </a:bodyPr>
+          <a:lstStyle/>
+          <a:p>
+            <a:pPr algn="ctr">
+              <a:lnSpc>
+                <a:spcPct val="100000"/>
+              </a:lnSpc>
+            </a:pPr>
+            <a:r>
+              <a:rPr sz="1400" b="0" i="0">
+                <a:solidFill>
+                  <a:srgbClr val="493127"/>
+                </a:solidFill>
+              </a:rPr>
+              <a:t>사진을 넣어 주세요</a:t>
+            </a:r>
+          </a:p>
+        </p:txBody>
+      </p:sp>
+      <p:sp>
+        <p:nvSpPr>
+          <p:cNvPr id="4" name="장식"/>
+          <p:cNvSpPr/>
+          <p:nvPr/>
+        </p:nvSpPr>
+        <p:spPr>
+          <a:xfrm>
+            <a:off x="365750" y="365760"/>
+            <a:ext cx="3657508" cy="6126480"/>
+          </a:xfrm>
+          <a:prstGeom prst="rect">
+            <a:avLst/>
+          </a:prstGeom>
+          <a:noFill/>
+          <a:ln w="9525">
+            <a:solidFill>
+              <a:srgbClr val="26231F"/>
+            </a:solidFill>
+          </a:ln>
+        </p:spPr>
+        <p:txBody>
+          <a:bodyPr rtlCol="0" anchor="ctr"/>
+          <a:lstStyle/>
+          <a:p>
+            <a:pPr algn="ctr"/>
+          </a:p>
+        </p:txBody>
+      </p:sp>
+      <p:sp>
+        <p:nvSpPr>
+          <p:cNvPr id="5" name="라벨"/>
+          <p:cNvSpPr txBox="1"/>
+          <p:nvPr/>
+        </p:nvSpPr>
+        <p:spPr>
+          <a:xfrm>
+            <a:off x="6827349" y="2148840"/>
+            <a:ext cx="4632844" cy="274320"/>
+          </a:xfrm>
+          <a:prstGeom prst="rect">
+            <a:avLst/>
+          </a:prstGeom>
+          <a:noFill/>
+        </p:spPr>
+        <p:txBody>
+          <a:bodyPr wrap="square" lIns="54864" rIns="54864" tIns="27432" bIns="27432" anchor="t">
+            <a:noAutofit/>
+          </a:bodyPr>
+          <a:lstStyle/>
+          <a:p>
+            <a:pPr algn="l">
+              <a:lnSpc>
+                <a:spcPct val="115000"/>
+              </a:lnSpc>
+            </a:pPr>
+            <a:r>
+              <a:rPr sz="1000" b="1" i="0" spc="250">
+                <a:solidFill>
+                  <a:srgbClr val="26231F"/>
+                </a:solidFill>
+              </a:rPr>
+              <a:t>FIRST BIRTHDAY</a:t>
+            </a:r>
+          </a:p>
+        </p:txBody>
+      </p:sp>
       <p:sp>
         <p:nvSpPr>
           <p:cNvPr id="2" name="Title 1"/>
@@ -5394,8 +5700,8 @@
         </p:nvSpPr>
         <p:spPr>
           <a:xfrm>
-            <a:off x="853418" y="2057400"/>
-            <a:ext cx="6095847" cy="1554480"/>
+            <a:off x="6827349" y="2606040"/>
+            <a:ext cx="4632844" cy="1188720"/>
           </a:xfrm>
         </p:spPr>
         <p:txBody>
@@ -5412,7 +5718,7 @@
             <a:r>
               <a:rPr sz="3400" b="1" i="0">
                 <a:solidFill>
-                  <a:srgbClr val="422D24"/>
+                  <a:srgbClr val="26231F"/>
                 </a:solidFill>
               </a:rPr>
               <a:t>와 주셔서 고맙습니다</a:t>
@@ -5422,14 +5728,14 @@
       </p:sp>
       <p:sp>
         <p:nvSpPr>
-          <p:cNvPr id="4" name="한 줄 문구"/>
+          <p:cNvPr id="6" name="한 줄 문구"/>
           <p:cNvSpPr txBox="1"/>
           <p:nvPr/>
         </p:nvSpPr>
         <p:spPr>
           <a:xfrm>
-            <a:off x="853418" y="3749039"/>
-            <a:ext cx="6095847" cy="822960"/>
+            <a:off x="6827349" y="3886200"/>
+            <a:ext cx="4632844" cy="822960"/>
           </a:xfrm>
           <a:prstGeom prst="rect">
             <a:avLst/>
@@ -5448,9 +5754,9 @@
               </a:lnSpc>
             </a:pPr>
             <a:r>
-              <a:rPr sz="1700" b="0" i="1">
+              <a:rPr sz="1700" b="0" i="0">
                 <a:solidFill>
-                  <a:srgbClr val="422D24"/>
+                  <a:srgbClr val="26231F"/>
                 </a:solidFill>
               </a:rPr>
               <a:t>아이가 한 살이 되었습니다</a:t>
@@ -5460,14 +5766,14 @@
       </p:sp>
       <p:sp>
         <p:nvSpPr>
-          <p:cNvPr id="5" name="안내 문구"/>
+          <p:cNvPr id="7" name="안내 문구"/>
           <p:cNvSpPr txBox="1"/>
           <p:nvPr/>
         </p:nvSpPr>
         <p:spPr>
           <a:xfrm>
-            <a:off x="853418" y="4617720"/>
-            <a:ext cx="6095847" cy="914400"/>
+            <a:off x="6827349" y="4754880"/>
+            <a:ext cx="4632844" cy="914400"/>
           </a:xfrm>
           <a:prstGeom prst="rect">
             <a:avLst/>
@@ -5488,7 +5794,7 @@
             <a:r>
               <a:rPr sz="1400" b="0" i="0">
                 <a:solidFill>
-                  <a:srgbClr val="666666"/>
+                  <a:srgbClr val="26231F"/>
                 </a:solidFill>
               </a:rPr>
               <a:t>아기 이름 · 부모 이름</a:t>
@@ -5515,34 +5821,34 @@
         <a:sysClr val="window" lastClr="FFFFFF"/>
       </a:lt1>
       <a:dk2>
-        <a:srgbClr val="422D24"/>
+        <a:srgbClr val="493127"/>
       </a:dk2>
       <a:lt2>
-        <a:srgbClr val="F8F4F2"/>
+        <a:srgbClr val="FBF1EC"/>
       </a:lt2>
       <a:accent1>
-        <a:srgbClr val="855A47"/>
+        <a:srgbClr val="D89579"/>
       </a:accent1>
       <a:accent2>
-        <a:srgbClr val="478578"/>
+        <a:srgbClr val="E1D098"/>
       </a:accent2>
       <a:accent3>
-        <a:srgbClr val="422D24"/>
+        <a:srgbClr val="493127"/>
       </a:accent3>
       <a:accent4>
-        <a:srgbClr val="EBDCD6"/>
+        <a:srgbClr val="F6DFD5"/>
       </a:accent4>
       <a:accent5>
-        <a:srgbClr val="667060"/>
+        <a:srgbClr val="DCB288"/>
       </a:accent5>
       <a:accent6>
-        <a:srgbClr val="8E817C"/>
+        <a:srgbClr val="92837D"/>
       </a:accent6>
       <a:hlink>
-        <a:srgbClr val="855A47"/>
+        <a:srgbClr val="D89579"/>
       </a:hlink>
       <a:folHlink>
-        <a:srgbClr val="422D24"/>
+        <a:srgbClr val="493127"/>
       </a:folHlink>
     </a:clrScheme>
     <a:fontScheme name="Office">
